--- a/开题/蒋奕文_开题答辩.pptx
+++ b/开题/蒋奕文_开题答辩.pptx
@@ -9251,21 +9251,23 @@
               </a:spcAft>
             </a:pPr>
             <a:r>
-              <a:rPr lang="zh-CN" altLang="en-US" sz="2000" b="1" dirty="0">
+              <a:rPr lang="zh-CN" altLang="en-US" sz="2000" dirty="0">
                 <a:solidFill>
                   <a:srgbClr val="000000"/>
                 </a:solidFill>
-                <a:latin typeface="黑体" panose="02010609060101010101" pitchFamily="49" charset="-122"/>
-                <a:ea typeface="黑体" panose="02010609060101010101" pitchFamily="49" charset="-122"/>
+                <a:latin typeface="微软雅黑" panose="020B0503020204020204" pitchFamily="34" charset="-122"/>
+                <a:ea typeface="微软雅黑" panose="020B0503020204020204" pitchFamily="34" charset="-122"/>
+                <a:cs typeface="微软雅黑" panose="020B0503020204020204" pitchFamily="34" charset="-122"/>
               </a:rPr>
               <a:t>答辩人：蒋奕文</a:t>
             </a:r>
-            <a:endParaRPr lang="zh-CN" altLang="en-US" sz="2000" b="1" dirty="0">
+            <a:endParaRPr lang="zh-CN" altLang="en-US" sz="2000" dirty="0">
               <a:solidFill>
                 <a:srgbClr val="000000"/>
               </a:solidFill>
-              <a:latin typeface="黑体" panose="02010609060101010101" pitchFamily="49" charset="-122"/>
-              <a:ea typeface="黑体" panose="02010609060101010101" pitchFamily="49" charset="-122"/>
+              <a:latin typeface="微软雅黑" panose="020B0503020204020204" pitchFamily="34" charset="-122"/>
+              <a:ea typeface="微软雅黑" panose="020B0503020204020204" pitchFamily="34" charset="-122"/>
+              <a:cs typeface="微软雅黑" panose="020B0503020204020204" pitchFamily="34" charset="-122"/>
             </a:endParaRPr>
           </a:p>
           <a:p>
@@ -9278,81 +9280,89 @@
               </a:spcAft>
             </a:pPr>
             <a:r>
-              <a:rPr lang="zh-CN" altLang="en-US" sz="2000" b="1" dirty="0">
+              <a:rPr lang="zh-CN" altLang="en-US" sz="2000" dirty="0">
                 <a:solidFill>
                   <a:srgbClr val="000000"/>
                 </a:solidFill>
-                <a:latin typeface="黑体" panose="02010609060101010101" pitchFamily="49" charset="-122"/>
-                <a:ea typeface="黑体" panose="02010609060101010101" pitchFamily="49" charset="-122"/>
+                <a:latin typeface="微软雅黑" panose="020B0503020204020204" pitchFamily="34" charset="-122"/>
+                <a:ea typeface="微软雅黑" panose="020B0503020204020204" pitchFamily="34" charset="-122"/>
+                <a:cs typeface="微软雅黑" panose="020B0503020204020204" pitchFamily="34" charset="-122"/>
               </a:rPr>
               <a:t>时间：</a:t>
             </a:r>
             <a:r>
-              <a:rPr lang="en-US" altLang="zh-CN" sz="2000" b="1" dirty="0">
+              <a:rPr lang="en-US" altLang="zh-CN" sz="2000" dirty="0">
                 <a:solidFill>
                   <a:srgbClr val="000000"/>
                 </a:solidFill>
-                <a:latin typeface="黑体" panose="02010609060101010101" pitchFamily="49" charset="-122"/>
-                <a:ea typeface="黑体" panose="02010609060101010101" pitchFamily="49" charset="-122"/>
+                <a:latin typeface="微软雅黑" panose="020B0503020204020204" pitchFamily="34" charset="-122"/>
+                <a:ea typeface="微软雅黑" panose="020B0503020204020204" pitchFamily="34" charset="-122"/>
+                <a:cs typeface="微软雅黑" panose="020B0503020204020204" pitchFamily="34" charset="-122"/>
               </a:rPr>
               <a:t>2026</a:t>
             </a:r>
             <a:r>
-              <a:rPr lang="zh-CN" altLang="en-US" sz="2000" b="1" dirty="0">
+              <a:rPr lang="zh-CN" altLang="en-US" sz="2000" dirty="0">
                 <a:solidFill>
                   <a:srgbClr val="000000"/>
                 </a:solidFill>
-                <a:latin typeface="黑体" panose="02010609060101010101" pitchFamily="49" charset="-122"/>
-                <a:ea typeface="黑体" panose="02010609060101010101" pitchFamily="49" charset="-122"/>
+                <a:latin typeface="微软雅黑" panose="020B0503020204020204" pitchFamily="34" charset="-122"/>
+                <a:ea typeface="微软雅黑" panose="020B0503020204020204" pitchFamily="34" charset="-122"/>
+                <a:cs typeface="微软雅黑" panose="020B0503020204020204" pitchFamily="34" charset="-122"/>
               </a:rPr>
               <a:t>年</a:t>
             </a:r>
             <a:r>
-              <a:rPr lang="en-US" altLang="zh-CN" sz="2000" b="1" dirty="0">
+              <a:rPr lang="en-US" altLang="zh-CN" sz="2000" dirty="0">
                 <a:solidFill>
                   <a:srgbClr val="000000"/>
                 </a:solidFill>
-                <a:latin typeface="黑体" panose="02010609060101010101" pitchFamily="49" charset="-122"/>
-                <a:ea typeface="黑体" panose="02010609060101010101" pitchFamily="49" charset="-122"/>
+                <a:latin typeface="微软雅黑" panose="020B0503020204020204" pitchFamily="34" charset="-122"/>
+                <a:ea typeface="微软雅黑" panose="020B0503020204020204" pitchFamily="34" charset="-122"/>
+                <a:cs typeface="微软雅黑" panose="020B0503020204020204" pitchFamily="34" charset="-122"/>
               </a:rPr>
               <a:t>6</a:t>
             </a:r>
             <a:r>
-              <a:rPr lang="zh-CN" altLang="en-US" sz="2000" b="1" dirty="0">
+              <a:rPr lang="zh-CN" altLang="en-US" sz="2000" dirty="0">
                 <a:solidFill>
                   <a:srgbClr val="000000"/>
                 </a:solidFill>
-                <a:latin typeface="黑体" panose="02010609060101010101" pitchFamily="49" charset="-122"/>
-                <a:ea typeface="黑体" panose="02010609060101010101" pitchFamily="49" charset="-122"/>
+                <a:latin typeface="微软雅黑" panose="020B0503020204020204" pitchFamily="34" charset="-122"/>
+                <a:ea typeface="微软雅黑" panose="020B0503020204020204" pitchFamily="34" charset="-122"/>
+                <a:cs typeface="微软雅黑" panose="020B0503020204020204" pitchFamily="34" charset="-122"/>
               </a:rPr>
               <a:t>月</a:t>
             </a:r>
             <a:r>
-              <a:rPr lang="en-US" altLang="zh-CN" sz="2000" b="1" dirty="0">
+              <a:rPr lang="en-US" altLang="zh-CN" sz="2000" dirty="0">
                 <a:solidFill>
                   <a:srgbClr val="000000"/>
                 </a:solidFill>
-                <a:latin typeface="黑体" panose="02010609060101010101" pitchFamily="49" charset="-122"/>
-                <a:ea typeface="黑体" panose="02010609060101010101" pitchFamily="49" charset="-122"/>
+                <a:latin typeface="微软雅黑" panose="020B0503020204020204" pitchFamily="34" charset="-122"/>
+                <a:ea typeface="微软雅黑" panose="020B0503020204020204" pitchFamily="34" charset="-122"/>
+                <a:cs typeface="微软雅黑" panose="020B0503020204020204" pitchFamily="34" charset="-122"/>
               </a:rPr>
               <a:t>8</a:t>
             </a:r>
             <a:r>
-              <a:rPr lang="zh-CN" altLang="en-US" sz="2000" b="1" dirty="0">
+              <a:rPr lang="zh-CN" altLang="en-US" sz="2000" dirty="0">
                 <a:solidFill>
                   <a:srgbClr val="000000"/>
                 </a:solidFill>
-                <a:latin typeface="黑体" panose="02010609060101010101" pitchFamily="49" charset="-122"/>
-                <a:ea typeface="黑体" panose="02010609060101010101" pitchFamily="49" charset="-122"/>
+                <a:latin typeface="微软雅黑" panose="020B0503020204020204" pitchFamily="34" charset="-122"/>
+                <a:ea typeface="微软雅黑" panose="020B0503020204020204" pitchFamily="34" charset="-122"/>
+                <a:cs typeface="微软雅黑" panose="020B0503020204020204" pitchFamily="34" charset="-122"/>
               </a:rPr>
               <a:t>日</a:t>
             </a:r>
-            <a:endParaRPr lang="zh-CN" altLang="en-US" sz="2000" b="1" dirty="0">
+            <a:endParaRPr lang="zh-CN" altLang="en-US" sz="2000" dirty="0">
               <a:solidFill>
                 <a:srgbClr val="000000"/>
               </a:solidFill>
-              <a:latin typeface="黑体" panose="02010609060101010101" pitchFamily="49" charset="-122"/>
-              <a:ea typeface="黑体" panose="02010609060101010101" pitchFamily="49" charset="-122"/>
+              <a:latin typeface="微软雅黑" panose="020B0503020204020204" pitchFamily="34" charset="-122"/>
+              <a:ea typeface="微软雅黑" panose="020B0503020204020204" pitchFamily="34" charset="-122"/>
+              <a:cs typeface="微软雅黑" panose="020B0503020204020204" pitchFamily="34" charset="-122"/>
             </a:endParaRPr>
           </a:p>
         </p:txBody>
@@ -9782,8 +9792,8 @@
         </p:nvSpPr>
         <p:spPr>
           <a:xfrm>
-            <a:off x="270510" y="5441315"/>
-            <a:ext cx="11506835" cy="1245235"/>
+            <a:off x="270510" y="5369560"/>
+            <a:ext cx="11506835" cy="1437640"/>
           </a:xfrm>
           <a:prstGeom prst="rect">
             <a:avLst/>
@@ -9803,7 +9813,7 @@
               <a:buChar char="•"/>
             </a:pPr>
             <a:r>
-              <a:rPr lang="zh-CN" altLang="en-US" sz="1500" kern="100" dirty="0">
+              <a:rPr lang="zh-CN" altLang="en-US" sz="1400" kern="100" dirty="0">
                 <a:latin typeface="微软雅黑" panose="020B0503020204020204" pitchFamily="34" charset="-122"/>
                 <a:ea typeface="微软雅黑" panose="020B0503020204020204" pitchFamily="34" charset="-122"/>
                 <a:cs typeface="Mongolian Baiti" panose="03000500000000000000" pitchFamily="66" charset="0"/>
@@ -9811,7 +9821,7 @@
               <a:t>本阶段依托完整的观测违约样本训练违约速度分类器，区分快速违约与慢速违约特征模式，同时训练神经网络代理模型，实现条件变量</a:t>
             </a:r>
             <a:r>
-              <a:rPr lang="en-US" altLang="zh-CN" sz="1500" kern="100" dirty="0">
+              <a:rPr lang="en-US" altLang="zh-CN" sz="1400" kern="100" dirty="0">
                 <a:latin typeface="微软雅黑" panose="020B0503020204020204" pitchFamily="34" charset="-122"/>
                 <a:ea typeface="微软雅黑" panose="020B0503020204020204" pitchFamily="34" charset="-122"/>
                 <a:cs typeface="Mongolian Baiti" panose="03000500000000000000" pitchFamily="66" charset="0"/>
@@ -9819,14 +9829,14 @@
               <a:t>r</a:t>
             </a:r>
             <a:r>
-              <a:rPr lang="zh-CN" altLang="en-US" sz="1500" kern="100" dirty="0">
+              <a:rPr lang="zh-CN" altLang="en-US" sz="1400" kern="100" dirty="0">
                 <a:latin typeface="微软雅黑" panose="020B0503020204020204" pitchFamily="34" charset="-122"/>
                 <a:ea typeface="微软雅黑" panose="020B0503020204020204" pitchFamily="34" charset="-122"/>
                 <a:cs typeface="Mongolian Baiti" panose="03000500000000000000" pitchFamily="66" charset="0"/>
               </a:rPr>
-              <a:t>的可微分拟合，为生成器提供稳定的条件约束信号</a:t>
-            </a:r>
-            <a:endParaRPr lang="zh-CN" altLang="en-US" sz="1500" kern="100" dirty="0">
+              <a:t>的可微分拟合，为生成器提供稳定的条件约束信号。</a:t>
+            </a:r>
+            <a:endParaRPr lang="zh-CN" altLang="en-US" sz="1400" kern="100" dirty="0">
               <a:latin typeface="微软雅黑" panose="020B0503020204020204" pitchFamily="34" charset="-122"/>
               <a:ea typeface="微软雅黑" panose="020B0503020204020204" pitchFamily="34" charset="-122"/>
               <a:cs typeface="Mongolian Baiti" panose="03000500000000000000" pitchFamily="66" charset="0"/>
@@ -9841,15 +9851,101 @@
               <a:buChar char="•"/>
             </a:pPr>
             <a:r>
-              <a:rPr lang="zh-CN" altLang="en-US" sz="1500" kern="100" dirty="0">
+              <a:rPr lang="zh-CN" altLang="en-US" sz="1400" kern="100" dirty="0">
                 <a:latin typeface="微软雅黑" panose="020B0503020204020204" pitchFamily="34" charset="-122"/>
                 <a:ea typeface="微软雅黑" panose="020B0503020204020204" pitchFamily="34" charset="-122"/>
                 <a:cs typeface="Mongolian Baiti" panose="03000500000000000000" pitchFamily="66" charset="0"/>
               </a:rPr>
+              <a:t>最终生成的输出的违约倾向得分</a:t>
+            </a:r>
+            <a:r>
+              <a:rPr lang="en-US" altLang="zh-CN" sz="1400" kern="100" dirty="0">
+                <a:latin typeface="微软雅黑" panose="020B0503020204020204" pitchFamily="34" charset="-122"/>
+                <a:ea typeface="微软雅黑" panose="020B0503020204020204" pitchFamily="34" charset="-122"/>
+                <a:cs typeface="Mongolian Baiti" panose="03000500000000000000" pitchFamily="66" charset="0"/>
+              </a:rPr>
+              <a:t>r</a:t>
+            </a:r>
+            <a:r>
+              <a:rPr lang="zh-CN" altLang="en-US" sz="1400" kern="100" dirty="0">
+                <a:latin typeface="微软雅黑" panose="020B0503020204020204" pitchFamily="34" charset="-122"/>
+                <a:ea typeface="微软雅黑" panose="020B0503020204020204" pitchFamily="34" charset="-122"/>
+                <a:cs typeface="Mongolian Baiti" panose="03000500000000000000" pitchFamily="66" charset="0"/>
+              </a:rPr>
+              <a:t>分布稳定，均值为</a:t>
+            </a:r>
+            <a:r>
+              <a:rPr lang="en-US" altLang="zh-CN" sz="1400" kern="100" dirty="0">
+                <a:latin typeface="微软雅黑" panose="020B0503020204020204" pitchFamily="34" charset="-122"/>
+                <a:ea typeface="微软雅黑" panose="020B0503020204020204" pitchFamily="34" charset="-122"/>
+                <a:cs typeface="Mongolian Baiti" panose="03000500000000000000" pitchFamily="66" charset="0"/>
+              </a:rPr>
+              <a:t>0.406</a:t>
+            </a:r>
+            <a:r>
+              <a:rPr lang="zh-CN" altLang="en-US" sz="1400" kern="100" dirty="0">
+                <a:latin typeface="微软雅黑" panose="020B0503020204020204" pitchFamily="34" charset="-122"/>
+                <a:ea typeface="微软雅黑" panose="020B0503020204020204" pitchFamily="34" charset="-122"/>
+                <a:cs typeface="Mongolian Baiti" panose="03000500000000000000" pitchFamily="66" charset="0"/>
+              </a:rPr>
+              <a:t>，标准差</a:t>
+            </a:r>
+            <a:r>
+              <a:rPr lang="en-US" altLang="zh-CN" sz="1400" kern="100" dirty="0">
+                <a:latin typeface="微软雅黑" panose="020B0503020204020204" pitchFamily="34" charset="-122"/>
+                <a:ea typeface="微软雅黑" panose="020B0503020204020204" pitchFamily="34" charset="-122"/>
+                <a:cs typeface="Mongolian Baiti" panose="03000500000000000000" pitchFamily="66" charset="0"/>
+              </a:rPr>
+              <a:t>0.074</a:t>
+            </a:r>
+            <a:r>
+              <a:rPr lang="zh-CN" altLang="en-US" sz="1400" kern="100" dirty="0">
+                <a:latin typeface="微软雅黑" panose="020B0503020204020204" pitchFamily="34" charset="-122"/>
+                <a:ea typeface="微软雅黑" panose="020B0503020204020204" pitchFamily="34" charset="-122"/>
+                <a:cs typeface="Mongolian Baiti" panose="03000500000000000000" pitchFamily="66" charset="0"/>
+              </a:rPr>
+              <a:t>，取值区间为</a:t>
+            </a:r>
+            <a:r>
+              <a:rPr lang="en-US" altLang="zh-CN" sz="1400" kern="100" dirty="0">
+                <a:latin typeface="微软雅黑" panose="020B0503020204020204" pitchFamily="34" charset="-122"/>
+                <a:ea typeface="微软雅黑" panose="020B0503020204020204" pitchFamily="34" charset="-122"/>
+                <a:cs typeface="Mongolian Baiti" panose="03000500000000000000" pitchFamily="66" charset="0"/>
+              </a:rPr>
+              <a:t>[0.08,0.95]</a:t>
+            </a:r>
+            <a:r>
+              <a:rPr lang="zh-CN" altLang="en-US" sz="1400" kern="100" dirty="0">
+                <a:latin typeface="微软雅黑" panose="020B0503020204020204" pitchFamily="34" charset="-122"/>
+                <a:ea typeface="微软雅黑" panose="020B0503020204020204" pitchFamily="34" charset="-122"/>
+                <a:cs typeface="Mongolian Baiti" panose="03000500000000000000" pitchFamily="66" charset="0"/>
+              </a:rPr>
+              <a:t>，风险区分度适中</a:t>
+            </a:r>
+            <a:endParaRPr lang="zh-CN" altLang="en-US" sz="1400" kern="100" dirty="0">
+              <a:latin typeface="微软雅黑" panose="020B0503020204020204" pitchFamily="34" charset="-122"/>
+              <a:ea typeface="微软雅黑" panose="020B0503020204020204" pitchFamily="34" charset="-122"/>
+              <a:cs typeface="Mongolian Baiti" panose="03000500000000000000" pitchFamily="66" charset="0"/>
+            </a:endParaRPr>
+          </a:p>
+          <a:p>
+            <a:pPr marL="285750" indent="-285750" algn="just" fontAlgn="auto" latinLnBrk="0">
+              <a:lnSpc>
+                <a:spcPct val="125000"/>
+              </a:lnSpc>
+              <a:buFont typeface="Arial" panose="020B0604020202020204" pitchFamily="34" charset="0"/>
+              <a:buChar char="•"/>
+            </a:pPr>
+            <a:r>
+              <a:rPr lang="zh-CN" altLang="en-US" sz="1400" kern="100" dirty="0">
+                <a:latin typeface="微软雅黑" panose="020B0503020204020204" pitchFamily="34" charset="-122"/>
+                <a:ea typeface="微软雅黑" panose="020B0503020204020204" pitchFamily="34" charset="-122"/>
+                <a:cs typeface="Mongolian Baiti" panose="03000500000000000000" pitchFamily="66" charset="0"/>
+              </a:rPr>
               <a:t>本阶段实验证实，违约速度分类器可精准挖掘信贷样本的违约快慢特征差异，</a:t>
             </a:r>
             <a:r>
-              <a:rPr lang="en-US" altLang="zh-CN" sz="1500" kern="100" dirty="0">
+              <a:rPr lang="en-US" altLang="zh-CN" sz="1400" kern="100" dirty="0">
                 <a:latin typeface="微软雅黑" panose="020B0503020204020204" pitchFamily="34" charset="-122"/>
                 <a:ea typeface="微软雅黑" panose="020B0503020204020204" pitchFamily="34" charset="-122"/>
                 <a:cs typeface="Mongolian Baiti" panose="03000500000000000000" pitchFamily="66" charset="0"/>
@@ -9857,7 +9953,7 @@
               <a:t>NN</a:t>
             </a:r>
             <a:r>
-              <a:rPr lang="zh-CN" altLang="en-US" sz="1500" kern="100" dirty="0">
+              <a:rPr lang="zh-CN" altLang="en-US" sz="1400" kern="100" dirty="0">
                 <a:latin typeface="微软雅黑" panose="020B0503020204020204" pitchFamily="34" charset="-122"/>
                 <a:ea typeface="微软雅黑" panose="020B0503020204020204" pitchFamily="34" charset="-122"/>
                 <a:cs typeface="Mongolian Baiti" panose="03000500000000000000" pitchFamily="66" charset="0"/>
@@ -9865,7 +9961,7 @@
               <a:t>代理模型拟合精度高、误差可控，能够稳定输出可微分的条件变量</a:t>
             </a:r>
             <a:r>
-              <a:rPr lang="en-US" altLang="zh-CN" sz="1500" kern="100" dirty="0">
+              <a:rPr lang="en-US" altLang="zh-CN" sz="1400" kern="100" dirty="0">
                 <a:latin typeface="微软雅黑" panose="020B0503020204020204" pitchFamily="34" charset="-122"/>
                 <a:ea typeface="微软雅黑" panose="020B0503020204020204" pitchFamily="34" charset="-122"/>
                 <a:cs typeface="Mongolian Baiti" panose="03000500000000000000" pitchFamily="66" charset="0"/>
@@ -9873,14 +9969,14 @@
               <a:t>r</a:t>
             </a:r>
             <a:r>
-              <a:rPr lang="zh-CN" altLang="en-US" sz="1500" kern="100" dirty="0">
+              <a:rPr lang="zh-CN" altLang="en-US" sz="1400" kern="100" dirty="0">
                 <a:latin typeface="微软雅黑" panose="020B0503020204020204" pitchFamily="34" charset="-122"/>
                 <a:ea typeface="微软雅黑" panose="020B0503020204020204" pitchFamily="34" charset="-122"/>
                 <a:cs typeface="Mongolian Baiti" panose="03000500000000000000" pitchFamily="66" charset="0"/>
               </a:rPr>
               <a:t>，彻底解决了右删失样本隐性风险特征无法量化、无法嵌入生成模型训练的问题，第一阶段核心技术链路完全跑通</a:t>
             </a:r>
-            <a:endParaRPr lang="zh-CN" altLang="en-US" sz="1500" kern="100" dirty="0">
+            <a:endParaRPr lang="zh-CN" altLang="en-US" sz="1400" kern="100" dirty="0">
               <a:latin typeface="微软雅黑" panose="020B0503020204020204" pitchFamily="34" charset="-122"/>
               <a:ea typeface="微软雅黑" panose="020B0503020204020204" pitchFamily="34" charset="-122"/>
               <a:cs typeface="Mongolian Baiti" panose="03000500000000000000" pitchFamily="66" charset="0"/>
@@ -11328,7 +11424,7 @@
         <p:spPr>
           <a:xfrm>
             <a:off x="270510" y="5441315"/>
-            <a:ext cx="11506835" cy="1245235"/>
+            <a:ext cx="11506835" cy="1207135"/>
           </a:xfrm>
           <a:prstGeom prst="rect">
             <a:avLst/>
@@ -11348,14 +11444,14 @@
               <a:buChar char="•"/>
             </a:pPr>
             <a:r>
-              <a:rPr lang="zh-CN" altLang="en-US" sz="1500" kern="100" dirty="0">
+              <a:rPr lang="zh-CN" altLang="en-US" sz="1450" kern="100" dirty="0">
                 <a:latin typeface="微软雅黑" panose="020B0503020204020204" pitchFamily="34" charset="-122"/>
                 <a:ea typeface="微软雅黑" panose="020B0503020204020204" pitchFamily="34" charset="-122"/>
                 <a:cs typeface="Mongolian Baiti" panose="03000500000000000000" pitchFamily="66" charset="0"/>
               </a:rPr>
               <a:t>本阶段通过边界富集度与裁判模型双维度，量化评估合成样本质量与模型预测性能</a:t>
             </a:r>
-            <a:endParaRPr lang="zh-CN" altLang="en-US" sz="1500" kern="100" dirty="0">
+            <a:endParaRPr lang="zh-CN" altLang="en-US" sz="1450" kern="100" dirty="0">
               <a:latin typeface="微软雅黑" panose="020B0503020204020204" pitchFamily="34" charset="-122"/>
               <a:ea typeface="微软雅黑" panose="020B0503020204020204" pitchFamily="34" charset="-122"/>
               <a:cs typeface="Mongolian Baiti" panose="03000500000000000000" pitchFamily="66" charset="0"/>
@@ -11370,7 +11466,7 @@
               <a:buChar char="•"/>
             </a:pPr>
             <a:r>
-              <a:rPr lang="zh-CN" altLang="en-US" sz="1500" kern="100" dirty="0">
+              <a:rPr lang="zh-CN" altLang="en-US" sz="1450" kern="100" dirty="0">
                 <a:latin typeface="微软雅黑" panose="020B0503020204020204" pitchFamily="34" charset="-122"/>
                 <a:ea typeface="微软雅黑" panose="020B0503020204020204" pitchFamily="34" charset="-122"/>
                 <a:cs typeface="Mongolian Baiti" panose="03000500000000000000" pitchFamily="66" charset="0"/>
@@ -11378,7 +11474,7 @@
               <a:t>在样本边界富集度层面</a:t>
             </a:r>
             <a:r>
-              <a:rPr lang="zh-CN" sz="1500" kern="100" dirty="0">
+              <a:rPr lang="zh-CN" sz="1450" kern="100" dirty="0">
                 <a:latin typeface="微软雅黑" panose="020B0503020204020204" pitchFamily="34" charset="-122"/>
                 <a:ea typeface="微软雅黑" panose="020B0503020204020204" pitchFamily="34" charset="-122"/>
                 <a:cs typeface="Mongolian Baiti" panose="03000500000000000000" pitchFamily="66" charset="0"/>
@@ -11386,7 +11482,7 @@
               <a:t>，</a:t>
             </a:r>
             <a:r>
-              <a:rPr lang="en-US" altLang="zh-CN" sz="1500" kern="100" dirty="0">
+              <a:rPr lang="en-US" altLang="zh-CN" sz="1450" kern="100" dirty="0">
                 <a:latin typeface="微软雅黑" panose="020B0503020204020204" pitchFamily="34" charset="-122"/>
                 <a:ea typeface="微软雅黑" panose="020B0503020204020204" pitchFamily="34" charset="-122"/>
                 <a:cs typeface="Mongolian Baiti" panose="03000500000000000000" pitchFamily="66" charset="0"/>
@@ -11394,7 +11490,7 @@
               <a:t>BA-cWGAN-GP</a:t>
             </a:r>
             <a:r>
-              <a:rPr lang="zh-CN" altLang="en-US" sz="1500" kern="100" dirty="0">
+              <a:rPr lang="zh-CN" altLang="en-US" sz="1450" kern="100" dirty="0">
                 <a:latin typeface="微软雅黑" panose="020B0503020204020204" pitchFamily="34" charset="-122"/>
                 <a:ea typeface="微软雅黑" panose="020B0503020204020204" pitchFamily="34" charset="-122"/>
                 <a:cs typeface="Mongolian Baiti" panose="03000500000000000000" pitchFamily="66" charset="0"/>
@@ -11402,7 +11498,7 @@
               <a:t>生成的合成样本边界富集度提升至</a:t>
             </a:r>
             <a:r>
-              <a:rPr lang="en-US" altLang="zh-CN" sz="1500" kern="100" dirty="0">
+              <a:rPr lang="en-US" altLang="zh-CN" sz="1450" kern="100" dirty="0">
                 <a:latin typeface="微软雅黑" panose="020B0503020204020204" pitchFamily="34" charset="-122"/>
                 <a:ea typeface="微软雅黑" panose="020B0503020204020204" pitchFamily="34" charset="-122"/>
                 <a:cs typeface="Mongolian Baiti" panose="03000500000000000000" pitchFamily="66" charset="0"/>
@@ -11410,7 +11506,7 @@
               <a:t>59.2%</a:t>
             </a:r>
             <a:r>
-              <a:rPr lang="zh-CN" altLang="en-US" sz="1500" kern="100" dirty="0">
+              <a:rPr lang="zh-CN" altLang="en-US" sz="1450" kern="100" dirty="0">
                 <a:latin typeface="微软雅黑" panose="020B0503020204020204" pitchFamily="34" charset="-122"/>
                 <a:ea typeface="微软雅黑" panose="020B0503020204020204" pitchFamily="34" charset="-122"/>
                 <a:cs typeface="Mongolian Baiti" panose="03000500000000000000" pitchFamily="66" charset="0"/>
@@ -11418,7 +11514,7 @@
               <a:t>（提升了</a:t>
             </a:r>
             <a:r>
-              <a:rPr lang="en-US" altLang="zh-CN" sz="1500" kern="100" dirty="0">
+              <a:rPr lang="en-US" altLang="zh-CN" sz="1450" kern="100" dirty="0">
                 <a:latin typeface="微软雅黑" panose="020B0503020204020204" pitchFamily="34" charset="-122"/>
                 <a:ea typeface="微软雅黑" panose="020B0503020204020204" pitchFamily="34" charset="-122"/>
                 <a:cs typeface="Mongolian Baiti" panose="03000500000000000000" pitchFamily="66" charset="0"/>
@@ -11426,14 +11522,14 @@
               <a:t>1.8</a:t>
             </a:r>
             <a:r>
-              <a:rPr lang="zh-CN" altLang="en-US" sz="1500" kern="100" dirty="0">
+              <a:rPr lang="zh-CN" altLang="en-US" sz="1450" kern="100" dirty="0">
                 <a:latin typeface="微软雅黑" panose="020B0503020204020204" pitchFamily="34" charset="-122"/>
                 <a:ea typeface="微软雅黑" panose="020B0503020204020204" pitchFamily="34" charset="-122"/>
                 <a:cs typeface="Mongolian Baiti" panose="03000500000000000000" pitchFamily="66" charset="0"/>
               </a:rPr>
               <a:t>倍），充分验证了边界感知机制的核心优势，从根源上解决了传统生成模型盲目采样、无效生成的缺陷</a:t>
             </a:r>
-            <a:endParaRPr lang="zh-CN" altLang="en-US" sz="1500" kern="100" dirty="0">
+            <a:endParaRPr lang="zh-CN" altLang="en-US" sz="1450" kern="100" dirty="0">
               <a:latin typeface="微软雅黑" panose="020B0503020204020204" pitchFamily="34" charset="-122"/>
               <a:ea typeface="微软雅黑" panose="020B0503020204020204" pitchFamily="34" charset="-122"/>
               <a:cs typeface="Mongolian Baiti" panose="03000500000000000000" pitchFamily="66" charset="0"/>
@@ -11448,7 +11544,7 @@
               <a:buChar char="•"/>
             </a:pPr>
             <a:r>
-              <a:rPr lang="zh-CN" altLang="en-US" sz="1500" kern="100" dirty="0">
+              <a:rPr lang="zh-CN" altLang="en-US" sz="1450" kern="100" dirty="0">
                 <a:latin typeface="微软雅黑" panose="020B0503020204020204" pitchFamily="34" charset="-122"/>
                 <a:ea typeface="微软雅黑" panose="020B0503020204020204" pitchFamily="34" charset="-122"/>
                 <a:cs typeface="Mongolian Baiti" panose="03000500000000000000" pitchFamily="66" charset="0"/>
@@ -11456,7 +11552,7 @@
               <a:t>相较于原始无采样、</a:t>
             </a:r>
             <a:r>
-              <a:rPr lang="en-US" altLang="zh-CN" sz="1500" kern="100" dirty="0">
+              <a:rPr lang="en-US" altLang="zh-CN" sz="1450" kern="100" dirty="0">
                 <a:latin typeface="微软雅黑" panose="020B0503020204020204" pitchFamily="34" charset="-122"/>
                 <a:ea typeface="微软雅黑" panose="020B0503020204020204" pitchFamily="34" charset="-122"/>
                 <a:cs typeface="Mongolian Baiti" panose="03000500000000000000" pitchFamily="66" charset="0"/>
@@ -11464,7 +11560,7 @@
               <a:t>SMOTE</a:t>
             </a:r>
             <a:r>
-              <a:rPr lang="zh-CN" altLang="en-US" sz="1500" kern="100" dirty="0">
+              <a:rPr lang="zh-CN" altLang="en-US" sz="1450" kern="100" dirty="0">
                 <a:latin typeface="微软雅黑" panose="020B0503020204020204" pitchFamily="34" charset="-122"/>
                 <a:ea typeface="微软雅黑" panose="020B0503020204020204" pitchFamily="34" charset="-122"/>
                 <a:cs typeface="Mongolian Baiti" panose="03000500000000000000" pitchFamily="66" charset="0"/>
@@ -11472,7 +11568,7 @@
               <a:t>过采样、标准</a:t>
             </a:r>
             <a:r>
-              <a:rPr lang="en-US" altLang="zh-CN" sz="1500" kern="100" dirty="0">
+              <a:rPr lang="en-US" altLang="zh-CN" sz="1450" kern="100" dirty="0">
                 <a:latin typeface="微软雅黑" panose="020B0503020204020204" pitchFamily="34" charset="-122"/>
                 <a:ea typeface="微软雅黑" panose="020B0503020204020204" pitchFamily="34" charset="-122"/>
                 <a:cs typeface="Mongolian Baiti" panose="03000500000000000000" pitchFamily="66" charset="0"/>
@@ -11480,7 +11576,7 @@
               <a:t>WGAN-GP</a:t>
             </a:r>
             <a:r>
-              <a:rPr lang="zh-CN" altLang="en-US" sz="1500" kern="100" dirty="0">
+              <a:rPr lang="zh-CN" altLang="en-US" sz="1450" kern="100" dirty="0">
                 <a:latin typeface="微软雅黑" panose="020B0503020204020204" pitchFamily="34" charset="-122"/>
                 <a:ea typeface="微软雅黑" panose="020B0503020204020204" pitchFamily="34" charset="-122"/>
                 <a:cs typeface="Mongolian Baiti" panose="03000500000000000000" pitchFamily="66" charset="0"/>
@@ -11488,7 +11584,7 @@
               <a:t>模型，</a:t>
             </a:r>
             <a:r>
-              <a:rPr lang="en-US" altLang="zh-CN" sz="1500" kern="100" dirty="0">
+              <a:rPr lang="en-US" altLang="zh-CN" sz="1450" kern="100" dirty="0">
                 <a:latin typeface="微软雅黑" panose="020B0503020204020204" pitchFamily="34" charset="-122"/>
                 <a:ea typeface="微软雅黑" panose="020B0503020204020204" pitchFamily="34" charset="-122"/>
                 <a:cs typeface="Mongolian Baiti" panose="03000500000000000000" pitchFamily="66" charset="0"/>
@@ -11496,7 +11592,7 @@
               <a:t>BA-cWGAN-GP</a:t>
             </a:r>
             <a:r>
-              <a:rPr lang="zh-CN" altLang="en-US" sz="1500" kern="100" dirty="0">
+              <a:rPr lang="zh-CN" altLang="en-US" sz="1450" kern="100" dirty="0">
                 <a:latin typeface="微软雅黑" panose="020B0503020204020204" pitchFamily="34" charset="-122"/>
                 <a:ea typeface="微软雅黑" panose="020B0503020204020204" pitchFamily="34" charset="-122"/>
                 <a:cs typeface="Mongolian Baiti" panose="03000500000000000000" pitchFamily="66" charset="0"/>
@@ -11504,7 +11600,7 @@
               <a:t>模型的</a:t>
             </a:r>
             <a:r>
-              <a:rPr lang="en-US" altLang="zh-CN" sz="1500" kern="100" dirty="0">
+              <a:rPr lang="en-US" altLang="zh-CN" sz="1450" kern="100" dirty="0">
                 <a:latin typeface="微软雅黑" panose="020B0503020204020204" pitchFamily="34" charset="-122"/>
                 <a:ea typeface="微软雅黑" panose="020B0503020204020204" pitchFamily="34" charset="-122"/>
                 <a:cs typeface="Mongolian Baiti" panose="03000500000000000000" pitchFamily="66" charset="0"/>
@@ -11512,30 +11608,46 @@
               <a:t>Brier</a:t>
             </a:r>
             <a:r>
-              <a:rPr lang="zh-CN" altLang="en-US" sz="1500" kern="100" dirty="0">
+              <a:rPr lang="zh-CN" altLang="en-US" sz="1450" kern="100" dirty="0">
                 <a:latin typeface="微软雅黑" panose="020B0503020204020204" pitchFamily="34" charset="-122"/>
                 <a:ea typeface="微软雅黑" panose="020B0503020204020204" pitchFamily="34" charset="-122"/>
                 <a:cs typeface="Mongolian Baiti" panose="03000500000000000000" pitchFamily="66" charset="0"/>
               </a:rPr>
-              <a:t>分数降至</a:t>
-            </a:r>
-            <a:r>
-              <a:rPr lang="en-US" altLang="zh-CN" sz="1500" kern="100" dirty="0">
+              <a:t>分数从</a:t>
+            </a:r>
+            <a:r>
+              <a:rPr lang="en-US" altLang="zh-CN" sz="1450" kern="100" dirty="0">
                 <a:latin typeface="微软雅黑" panose="020B0503020204020204" pitchFamily="34" charset="-122"/>
                 <a:ea typeface="微软雅黑" panose="020B0503020204020204" pitchFamily="34" charset="-122"/>
                 <a:cs typeface="Mongolian Baiti" panose="03000500000000000000" pitchFamily="66" charset="0"/>
               </a:rPr>
+              <a:t>0.2017</a:t>
+            </a:r>
+            <a:r>
+              <a:rPr lang="zh-CN" altLang="en-US" sz="1450" kern="100" dirty="0">
+                <a:latin typeface="微软雅黑" panose="020B0503020204020204" pitchFamily="34" charset="-122"/>
+                <a:ea typeface="微软雅黑" panose="020B0503020204020204" pitchFamily="34" charset="-122"/>
+                <a:cs typeface="Mongolian Baiti" panose="03000500000000000000" pitchFamily="66" charset="0"/>
+              </a:rPr>
+              <a:t>降至</a:t>
+            </a:r>
+            <a:r>
+              <a:rPr lang="en-US" altLang="zh-CN" sz="1450" kern="100" dirty="0">
+                <a:latin typeface="微软雅黑" panose="020B0503020204020204" pitchFamily="34" charset="-122"/>
+                <a:ea typeface="微软雅黑" panose="020B0503020204020204" pitchFamily="34" charset="-122"/>
+                <a:cs typeface="Mongolian Baiti" panose="03000500000000000000" pitchFamily="66" charset="0"/>
+              </a:rPr>
               <a:t>0.0623</a:t>
             </a:r>
             <a:r>
-              <a:rPr lang="zh-CN" altLang="en-US" sz="1500" kern="100" dirty="0">
+              <a:rPr lang="zh-CN" altLang="en-US" sz="1450" kern="100" dirty="0">
                 <a:latin typeface="微软雅黑" panose="020B0503020204020204" pitchFamily="34" charset="-122"/>
                 <a:ea typeface="微软雅黑" panose="020B0503020204020204" pitchFamily="34" charset="-122"/>
                 <a:cs typeface="Mongolian Baiti" panose="03000500000000000000" pitchFamily="66" charset="0"/>
               </a:rPr>
               <a:t>，预测误差显著降低</a:t>
             </a:r>
-            <a:endParaRPr lang="zh-CN" altLang="en-US" sz="1500" kern="100" dirty="0">
+            <a:endParaRPr lang="zh-CN" altLang="en-US" sz="1450" kern="100" dirty="0">
               <a:latin typeface="微软雅黑" panose="020B0503020204020204" pitchFamily="34" charset="-122"/>
               <a:ea typeface="微软雅黑" panose="020B0503020204020204" pitchFamily="34" charset="-122"/>
               <a:cs typeface="Mongolian Baiti" panose="03000500000000000000" pitchFamily="66" charset="0"/>
@@ -14530,7 +14642,7 @@
                 <a:latin typeface="微软雅黑" panose="020B0503020204020204" pitchFamily="34" charset="-122"/>
                 <a:ea typeface="微软雅黑" panose="020B0503020204020204" pitchFamily="34" charset="-122"/>
               </a:rPr>
-              <a:t>请老师批评指正</a:t>
+              <a:t>感谢各位老师批评指正</a:t>
             </a:r>
             <a:endParaRPr lang="zh-CN" altLang="en-US" sz="4800" b="1" spc="300" dirty="0">
               <a:solidFill>
@@ -14757,21 +14869,23 @@
               </a:spcAft>
             </a:pPr>
             <a:r>
-              <a:rPr lang="zh-CN" altLang="en-US" sz="2000" b="1" dirty="0">
+              <a:rPr lang="zh-CN" altLang="en-US" sz="2000" dirty="0">
                 <a:solidFill>
                   <a:srgbClr val="000000"/>
                 </a:solidFill>
-                <a:latin typeface="黑体" panose="02010609060101010101" pitchFamily="49" charset="-122"/>
-                <a:ea typeface="黑体" panose="02010609060101010101" pitchFamily="49" charset="-122"/>
+                <a:latin typeface="微软雅黑" panose="020B0503020204020204" pitchFamily="34" charset="-122"/>
+                <a:ea typeface="微软雅黑" panose="020B0503020204020204" pitchFamily="34" charset="-122"/>
+                <a:cs typeface="微软雅黑" panose="020B0503020204020204" pitchFamily="34" charset="-122"/>
               </a:rPr>
               <a:t>答辩人：蒋奕文</a:t>
             </a:r>
-            <a:endParaRPr lang="zh-CN" altLang="en-US" sz="2000" b="1" dirty="0">
+            <a:endParaRPr lang="zh-CN" altLang="en-US" sz="2000" dirty="0">
               <a:solidFill>
                 <a:srgbClr val="000000"/>
               </a:solidFill>
-              <a:latin typeface="黑体" panose="02010609060101010101" pitchFamily="49" charset="-122"/>
-              <a:ea typeface="黑体" panose="02010609060101010101" pitchFamily="49" charset="-122"/>
+              <a:latin typeface="微软雅黑" panose="020B0503020204020204" pitchFamily="34" charset="-122"/>
+              <a:ea typeface="微软雅黑" panose="020B0503020204020204" pitchFamily="34" charset="-122"/>
+              <a:cs typeface="微软雅黑" panose="020B0503020204020204" pitchFamily="34" charset="-122"/>
             </a:endParaRPr>
           </a:p>
           <a:p>
@@ -14784,81 +14898,89 @@
               </a:spcAft>
             </a:pPr>
             <a:r>
-              <a:rPr lang="zh-CN" altLang="en-US" sz="2000" b="1" dirty="0">
+              <a:rPr lang="zh-CN" altLang="en-US" sz="2000" dirty="0">
                 <a:solidFill>
                   <a:srgbClr val="000000"/>
                 </a:solidFill>
-                <a:latin typeface="黑体" panose="02010609060101010101" pitchFamily="49" charset="-122"/>
-                <a:ea typeface="黑体" panose="02010609060101010101" pitchFamily="49" charset="-122"/>
+                <a:latin typeface="微软雅黑" panose="020B0503020204020204" pitchFamily="34" charset="-122"/>
+                <a:ea typeface="微软雅黑" panose="020B0503020204020204" pitchFamily="34" charset="-122"/>
+                <a:cs typeface="微软雅黑" panose="020B0503020204020204" pitchFamily="34" charset="-122"/>
               </a:rPr>
               <a:t>时间：</a:t>
             </a:r>
             <a:r>
-              <a:rPr lang="en-US" altLang="zh-CN" sz="2000" b="1" dirty="0">
+              <a:rPr lang="en-US" altLang="zh-CN" sz="2000" dirty="0">
                 <a:solidFill>
                   <a:srgbClr val="000000"/>
                 </a:solidFill>
-                <a:latin typeface="黑体" panose="02010609060101010101" pitchFamily="49" charset="-122"/>
-                <a:ea typeface="黑体" panose="02010609060101010101" pitchFamily="49" charset="-122"/>
+                <a:latin typeface="微软雅黑" panose="020B0503020204020204" pitchFamily="34" charset="-122"/>
+                <a:ea typeface="微软雅黑" panose="020B0503020204020204" pitchFamily="34" charset="-122"/>
+                <a:cs typeface="微软雅黑" panose="020B0503020204020204" pitchFamily="34" charset="-122"/>
               </a:rPr>
               <a:t>2026</a:t>
             </a:r>
             <a:r>
-              <a:rPr lang="zh-CN" altLang="en-US" sz="2000" b="1" dirty="0">
+              <a:rPr lang="zh-CN" altLang="en-US" sz="2000" dirty="0">
                 <a:solidFill>
                   <a:srgbClr val="000000"/>
                 </a:solidFill>
-                <a:latin typeface="黑体" panose="02010609060101010101" pitchFamily="49" charset="-122"/>
-                <a:ea typeface="黑体" panose="02010609060101010101" pitchFamily="49" charset="-122"/>
+                <a:latin typeface="微软雅黑" panose="020B0503020204020204" pitchFamily="34" charset="-122"/>
+                <a:ea typeface="微软雅黑" panose="020B0503020204020204" pitchFamily="34" charset="-122"/>
+                <a:cs typeface="微软雅黑" panose="020B0503020204020204" pitchFamily="34" charset="-122"/>
               </a:rPr>
               <a:t>年</a:t>
             </a:r>
             <a:r>
-              <a:rPr lang="en-US" altLang="zh-CN" sz="2000" b="1" dirty="0">
+              <a:rPr lang="en-US" altLang="zh-CN" sz="2000" dirty="0">
                 <a:solidFill>
                   <a:srgbClr val="000000"/>
                 </a:solidFill>
-                <a:latin typeface="黑体" panose="02010609060101010101" pitchFamily="49" charset="-122"/>
-                <a:ea typeface="黑体" panose="02010609060101010101" pitchFamily="49" charset="-122"/>
+                <a:latin typeface="微软雅黑" panose="020B0503020204020204" pitchFamily="34" charset="-122"/>
+                <a:ea typeface="微软雅黑" panose="020B0503020204020204" pitchFamily="34" charset="-122"/>
+                <a:cs typeface="微软雅黑" panose="020B0503020204020204" pitchFamily="34" charset="-122"/>
               </a:rPr>
               <a:t>6</a:t>
             </a:r>
             <a:r>
-              <a:rPr lang="zh-CN" altLang="en-US" sz="2000" b="1" dirty="0">
+              <a:rPr lang="zh-CN" altLang="en-US" sz="2000" dirty="0">
                 <a:solidFill>
                   <a:srgbClr val="000000"/>
                 </a:solidFill>
-                <a:latin typeface="黑体" panose="02010609060101010101" pitchFamily="49" charset="-122"/>
-                <a:ea typeface="黑体" panose="02010609060101010101" pitchFamily="49" charset="-122"/>
+                <a:latin typeface="微软雅黑" panose="020B0503020204020204" pitchFamily="34" charset="-122"/>
+                <a:ea typeface="微软雅黑" panose="020B0503020204020204" pitchFamily="34" charset="-122"/>
+                <a:cs typeface="微软雅黑" panose="020B0503020204020204" pitchFamily="34" charset="-122"/>
               </a:rPr>
               <a:t>月</a:t>
             </a:r>
             <a:r>
-              <a:rPr lang="en-US" altLang="zh-CN" sz="2000" b="1" dirty="0">
+              <a:rPr lang="en-US" altLang="zh-CN" sz="2000" dirty="0">
                 <a:solidFill>
                   <a:srgbClr val="000000"/>
                 </a:solidFill>
-                <a:latin typeface="黑体" panose="02010609060101010101" pitchFamily="49" charset="-122"/>
-                <a:ea typeface="黑体" panose="02010609060101010101" pitchFamily="49" charset="-122"/>
+                <a:latin typeface="微软雅黑" panose="020B0503020204020204" pitchFamily="34" charset="-122"/>
+                <a:ea typeface="微软雅黑" panose="020B0503020204020204" pitchFamily="34" charset="-122"/>
+                <a:cs typeface="微软雅黑" panose="020B0503020204020204" pitchFamily="34" charset="-122"/>
               </a:rPr>
               <a:t>8</a:t>
             </a:r>
             <a:r>
-              <a:rPr lang="zh-CN" altLang="en-US" sz="2000" b="1" dirty="0">
+              <a:rPr lang="zh-CN" altLang="en-US" sz="2000" dirty="0">
                 <a:solidFill>
                   <a:srgbClr val="000000"/>
                 </a:solidFill>
-                <a:latin typeface="黑体" panose="02010609060101010101" pitchFamily="49" charset="-122"/>
-                <a:ea typeface="黑体" panose="02010609060101010101" pitchFamily="49" charset="-122"/>
+                <a:latin typeface="微软雅黑" panose="020B0503020204020204" pitchFamily="34" charset="-122"/>
+                <a:ea typeface="微软雅黑" panose="020B0503020204020204" pitchFamily="34" charset="-122"/>
+                <a:cs typeface="微软雅黑" panose="020B0503020204020204" pitchFamily="34" charset="-122"/>
               </a:rPr>
               <a:t>日</a:t>
             </a:r>
-            <a:endParaRPr lang="zh-CN" altLang="en-US" sz="2000" b="1" dirty="0">
+            <a:endParaRPr lang="zh-CN" altLang="en-US" sz="2000" dirty="0">
               <a:solidFill>
                 <a:srgbClr val="000000"/>
               </a:solidFill>
-              <a:latin typeface="黑体" panose="02010609060101010101" pitchFamily="49" charset="-122"/>
-              <a:ea typeface="黑体" panose="02010609060101010101" pitchFamily="49" charset="-122"/>
+              <a:latin typeface="微软雅黑" panose="020B0503020204020204" pitchFamily="34" charset="-122"/>
+              <a:ea typeface="微软雅黑" panose="020B0503020204020204" pitchFamily="34" charset="-122"/>
+              <a:cs typeface="微软雅黑" panose="020B0503020204020204" pitchFamily="34" charset="-122"/>
             </a:endParaRPr>
           </a:p>
         </p:txBody>
@@ -18336,39 +18458,44 @@
             </a:pPr>
             <a:r>
               <a:rPr lang="en-US" altLang="zh-CN" sz="1400" dirty="0">
-                <a:latin typeface="Times New Roman" panose="02020603050405020304" charset="0"/>
-                <a:ea typeface="微软雅黑" panose="020B0503020204020204" pitchFamily="34" charset="-122"/>
+                <a:latin typeface="微软雅黑" panose="020B0503020204020204" pitchFamily="34" charset="-122"/>
+                <a:ea typeface="微软雅黑" panose="020B0503020204020204" pitchFamily="34" charset="-122"/>
+                <a:cs typeface="微软雅黑" panose="020B0503020204020204" pitchFamily="34" charset="-122"/>
                 <a:sym typeface="+mn-ea"/>
               </a:rPr>
               <a:t>Altman</a:t>
             </a:r>
             <a:r>
               <a:rPr lang="zh-CN" altLang="en-US" sz="1400" dirty="0">
-                <a:latin typeface="Times New Roman" panose="02020603050405020304" charset="0"/>
-                <a:ea typeface="微软雅黑" panose="020B0503020204020204" pitchFamily="34" charset="-122"/>
+                <a:latin typeface="微软雅黑" panose="020B0503020204020204" pitchFamily="34" charset="-122"/>
+                <a:ea typeface="微软雅黑" panose="020B0503020204020204" pitchFamily="34" charset="-122"/>
+                <a:cs typeface="微软雅黑" panose="020B0503020204020204" pitchFamily="34" charset="-122"/>
                 <a:sym typeface="+mn-ea"/>
               </a:rPr>
               <a:t>（</a:t>
             </a:r>
             <a:r>
               <a:rPr lang="en-US" altLang="zh-CN" sz="1400" dirty="0">
-                <a:latin typeface="Times New Roman" panose="02020603050405020304" charset="0"/>
-                <a:ea typeface="微软雅黑" panose="020B0503020204020204" pitchFamily="34" charset="-122"/>
+                <a:latin typeface="微软雅黑" panose="020B0503020204020204" pitchFamily="34" charset="-122"/>
+                <a:ea typeface="微软雅黑" panose="020B0503020204020204" pitchFamily="34" charset="-122"/>
+                <a:cs typeface="微软雅黑" panose="020B0503020204020204" pitchFamily="34" charset="-122"/>
                 <a:sym typeface="+mn-ea"/>
               </a:rPr>
               <a:t>1968</a:t>
             </a:r>
             <a:r>
               <a:rPr lang="zh-CN" altLang="en-US" sz="1400" dirty="0">
-                <a:latin typeface="Times New Roman" panose="02020603050405020304" charset="0"/>
-                <a:ea typeface="微软雅黑" panose="020B0503020204020204" pitchFamily="34" charset="-122"/>
+                <a:latin typeface="微软雅黑" panose="020B0503020204020204" pitchFamily="34" charset="-122"/>
+                <a:ea typeface="微软雅黑" panose="020B0503020204020204" pitchFamily="34" charset="-122"/>
+                <a:cs typeface="微软雅黑" panose="020B0503020204020204" pitchFamily="34" charset="-122"/>
                 <a:sym typeface="+mn-ea"/>
               </a:rPr>
               <a:t>）提出Z-Score模型，整合多维财务指标，建立了企业财务的量化判别标准。</a:t>
             </a:r>
             <a:endParaRPr lang="zh-CN" altLang="en-US" sz="1400" dirty="0">
-              <a:latin typeface="Times New Roman" panose="02020603050405020304" charset="0"/>
+              <a:latin typeface="微软雅黑" panose="020B0503020204020204" pitchFamily="34" charset="-122"/>
               <a:ea typeface="微软雅黑" panose="020B0503020204020204" pitchFamily="34" charset="-122"/>
+              <a:cs typeface="微软雅黑" panose="020B0503020204020204" pitchFamily="34" charset="-122"/>
             </a:endParaRPr>
           </a:p>
           <a:p>
@@ -18383,8 +18510,9 @@
             </a:pPr>
             <a:r>
               <a:rPr lang="zh-CN" altLang="en-US" sz="1400" dirty="0">
-                <a:latin typeface="Times New Roman" panose="02020603050405020304" charset="0"/>
-                <a:ea typeface="微软雅黑" panose="020B0503020204020204" pitchFamily="34" charset="-122"/>
+                <a:latin typeface="微软雅黑" panose="020B0503020204020204" pitchFamily="34" charset="-122"/>
+                <a:ea typeface="微软雅黑" panose="020B0503020204020204" pitchFamily="34" charset="-122"/>
+                <a:cs typeface="微软雅黑" panose="020B0503020204020204" pitchFamily="34" charset="-122"/>
                 <a:sym typeface="+mn-ea"/>
               </a:rPr>
               <a:t>风险评估从主观经验判断向客观计量分析的跨越，为后续复杂算法的应用提供了方法论基础</a:t>
@@ -18446,7 +18574,7 @@
                 </a:solidFill>
                 <a:latin typeface="微软雅黑" panose="020B0503020204020204" pitchFamily="34" charset="-122"/>
                 <a:ea typeface="微软雅黑" panose="020B0503020204020204" pitchFamily="34" charset="-122"/>
-                <a:cs typeface="Noto Sans SC" panose="020B0200000000000000" charset="-122"/>
+                <a:cs typeface="微软雅黑" panose="020B0503020204020204" pitchFamily="34" charset="-122"/>
                 <a:sym typeface="Noto Sans SC" panose="020B0200000000000000" charset="-122"/>
               </a:rPr>
               <a:t>技术革新</a:t>
@@ -18457,6 +18585,7 @@
               </a:solidFill>
               <a:latin typeface="微软雅黑" panose="020B0503020204020204" pitchFamily="34" charset="-122"/>
               <a:ea typeface="微软雅黑" panose="020B0503020204020204" pitchFamily="34" charset="-122"/>
+              <a:cs typeface="微软雅黑" panose="020B0503020204020204" pitchFamily="34" charset="-122"/>
             </a:endParaRPr>
           </a:p>
           <a:p>
@@ -18469,55 +18598,62 @@
             </a:pPr>
             <a:r>
               <a:rPr lang="zh-CN" altLang="en-US" sz="1400" b="1" dirty="0">
-                <a:latin typeface="Times New Roman" panose="02020603050405020304" charset="0"/>
-                <a:ea typeface="微软雅黑" panose="020B0503020204020204" pitchFamily="34" charset="-122"/>
+                <a:latin typeface="微软雅黑" panose="020B0503020204020204" pitchFamily="34" charset="-122"/>
+                <a:ea typeface="微软雅黑" panose="020B0503020204020204" pitchFamily="34" charset="-122"/>
+                <a:cs typeface="微软雅黑" panose="020B0503020204020204" pitchFamily="34" charset="-122"/>
                 <a:sym typeface="+mn-ea"/>
               </a:rPr>
               <a:t>智能模型迭代升级：</a:t>
             </a:r>
             <a:r>
               <a:rPr lang="zh-CN" altLang="en-US" sz="1400" dirty="0">
-                <a:latin typeface="Times New Roman" panose="02020603050405020304" charset="0"/>
-                <a:ea typeface="微软雅黑" panose="020B0503020204020204" pitchFamily="34" charset="-122"/>
+                <a:latin typeface="微软雅黑" panose="020B0503020204020204" pitchFamily="34" charset="-122"/>
+                <a:ea typeface="微软雅黑" panose="020B0503020204020204" pitchFamily="34" charset="-122"/>
+                <a:cs typeface="微软雅黑" panose="020B0503020204020204" pitchFamily="34" charset="-122"/>
                 <a:sym typeface="+mn-ea"/>
               </a:rPr>
               <a:t>将</a:t>
             </a:r>
             <a:r>
               <a:rPr lang="en-US" altLang="zh-CN" sz="1400" dirty="0">
-                <a:latin typeface="Times New Roman" panose="02020603050405020304" charset="0"/>
-                <a:ea typeface="微软雅黑" panose="020B0503020204020204" pitchFamily="34" charset="-122"/>
+                <a:latin typeface="微软雅黑" panose="020B0503020204020204" pitchFamily="34" charset="-122"/>
+                <a:ea typeface="微软雅黑" panose="020B0503020204020204" pitchFamily="34" charset="-122"/>
+                <a:cs typeface="微软雅黑" panose="020B0503020204020204" pitchFamily="34" charset="-122"/>
                 <a:sym typeface="+mn-ea"/>
               </a:rPr>
               <a:t>XGBoost</a:t>
             </a:r>
             <a:r>
               <a:rPr lang="zh-CN" altLang="en-US" sz="1400" dirty="0">
-                <a:latin typeface="Times New Roman" panose="02020603050405020304" charset="0"/>
-                <a:ea typeface="微软雅黑" panose="020B0503020204020204" pitchFamily="34" charset="-122"/>
+                <a:latin typeface="微软雅黑" panose="020B0503020204020204" pitchFamily="34" charset="-122"/>
+                <a:ea typeface="微软雅黑" panose="020B0503020204020204" pitchFamily="34" charset="-122"/>
+                <a:cs typeface="微软雅黑" panose="020B0503020204020204" pitchFamily="34" charset="-122"/>
                 <a:sym typeface="+mn-ea"/>
               </a:rPr>
               <a:t>、</a:t>
             </a:r>
             <a:r>
               <a:rPr lang="en-US" altLang="zh-CN" sz="1400" dirty="0">
-                <a:latin typeface="Times New Roman" panose="02020603050405020304" charset="0"/>
-                <a:ea typeface="微软雅黑" panose="020B0503020204020204" pitchFamily="34" charset="-122"/>
+                <a:latin typeface="微软雅黑" panose="020B0503020204020204" pitchFamily="34" charset="-122"/>
+                <a:ea typeface="微软雅黑" panose="020B0503020204020204" pitchFamily="34" charset="-122"/>
+                <a:cs typeface="微软雅黑" panose="020B0503020204020204" pitchFamily="34" charset="-122"/>
                 <a:sym typeface="+mn-ea"/>
               </a:rPr>
               <a:t>LightGBM </a:t>
             </a:r>
             <a:r>
               <a:rPr lang="zh-CN" altLang="en-US" sz="1400" dirty="0">
-                <a:latin typeface="Times New Roman" panose="02020603050405020304" charset="0"/>
-                <a:ea typeface="微软雅黑" panose="020B0503020204020204" pitchFamily="34" charset="-122"/>
+                <a:latin typeface="微软雅黑" panose="020B0503020204020204" pitchFamily="34" charset="-122"/>
+                <a:ea typeface="微软雅黑" panose="020B0503020204020204" pitchFamily="34" charset="-122"/>
+                <a:cs typeface="微软雅黑" panose="020B0503020204020204" pitchFamily="34" charset="-122"/>
                 <a:sym typeface="+mn-ea"/>
               </a:rPr>
               <a:t>等机器学习模型及特征筛选、智能调参优化算法引入信用风险评估</a:t>
             </a:r>
             <a:endParaRPr lang="zh-CN" altLang="en-US" sz="1400" dirty="0">
-              <a:latin typeface="Times New Roman" panose="02020603050405020304" charset="0"/>
+              <a:latin typeface="微软雅黑" panose="020B0503020204020204" pitchFamily="34" charset="-122"/>
               <a:ea typeface="微软雅黑" panose="020B0503020204020204" pitchFamily="34" charset="-122"/>
+              <a:cs typeface="微软雅黑" panose="020B0503020204020204" pitchFamily="34" charset="-122"/>
               <a:sym typeface="+mn-ea"/>
             </a:endParaRPr>
           </a:p>
@@ -18531,8 +18667,9 @@
             </a:pPr>
             <a:r>
               <a:rPr lang="zh-CN" altLang="en-US" sz="1400" b="1" dirty="0">
-                <a:latin typeface="Times New Roman" panose="02020603050405020304" charset="0"/>
-                <a:ea typeface="微软雅黑" panose="020B0503020204020204" pitchFamily="34" charset="-122"/>
+                <a:latin typeface="微软雅黑" panose="020B0503020204020204" pitchFamily="34" charset="-122"/>
+                <a:ea typeface="微软雅黑" panose="020B0503020204020204" pitchFamily="34" charset="-122"/>
+                <a:cs typeface="微软雅黑" panose="020B0503020204020204" pitchFamily="34" charset="-122"/>
                 <a:sym typeface="+mn-ea"/>
               </a:rPr>
               <a:t>集成学习建模：</a:t>
